--- a/cs701/slides/week-12.pptx
+++ b/cs701/slides/week-12.pptx
@@ -13888,7 +13888,7 @@
                   <a:srgbClr val="01AEFD"/>
                 </a:solidFill>
               </a:rPr>
-              <a:t>Type this into Wordle.java   -   line 1</a:t>
+              <a:t>Make a new file, Wordle.java, and type this in   -   line 1</a:t>
             </a:r>
           </a:p>
         </p:txBody>
@@ -17746,7 +17746,7 @@
                   <a:srgbClr val="DCECEF"/>
                 </a:solidFill>
               </a:rPr>
-              <a:t>Opens the class. Its name must be the file's name without .java - Wordle lives in Wordle.java - and every other line goes inside its braces.</a:t>
+              <a:t>Opens the class: Wordle, the file's name without .java.</a:t>
             </a:r>
           </a:p>
         </p:txBody>
